--- a/p04/A-frame-moving-geometric-objects.pptx
+++ b/p04/A-frame-moving-geometric-objects.pptx
@@ -224,7 +224,7 @@
           <a:p>
             <a:fld id="{FA1E3CD0-6E24-4AC0-945A-82AEC1490673}" type="datetimeFigureOut">
               <a:rPr lang="en-US" smtClean="0"/>
-              <a:t>5/20/2026</a:t>
+              <a:t>10/7/2026</a:t>
             </a:fld>
             <a:endParaRPr lang="en-US"/>
           </a:p>
@@ -706,7 +706,7 @@
           <a:p>
             <a:fld id="{846CE7D5-CF57-46EF-B807-FDD0502418D4}" type="datetimeFigureOut">
               <a:rPr lang="en-US" smtClean="0"/>
-              <a:t>5/20/2026</a:t>
+              <a:t>10/7/2026</a:t>
             </a:fld>
             <a:endParaRPr lang="en-US"/>
           </a:p>
@@ -876,7 +876,7 @@
           <a:p>
             <a:fld id="{846CE7D5-CF57-46EF-B807-FDD0502418D4}" type="datetimeFigureOut">
               <a:rPr lang="en-US" smtClean="0"/>
-              <a:t>5/20/2026</a:t>
+              <a:t>10/7/2026</a:t>
             </a:fld>
             <a:endParaRPr lang="en-US"/>
           </a:p>
@@ -1056,7 +1056,7 @@
           <a:p>
             <a:fld id="{846CE7D5-CF57-46EF-B807-FDD0502418D4}" type="datetimeFigureOut">
               <a:rPr lang="en-US" smtClean="0"/>
-              <a:t>5/20/2026</a:t>
+              <a:t>10/7/2026</a:t>
             </a:fld>
             <a:endParaRPr lang="en-US"/>
           </a:p>
@@ -1226,7 +1226,7 @@
           <a:p>
             <a:fld id="{846CE7D5-CF57-46EF-B807-FDD0502418D4}" type="datetimeFigureOut">
               <a:rPr lang="en-US" smtClean="0"/>
-              <a:t>5/20/2026</a:t>
+              <a:t>10/7/2026</a:t>
             </a:fld>
             <a:endParaRPr lang="en-US"/>
           </a:p>
@@ -1472,7 +1472,7 @@
           <a:p>
             <a:fld id="{846CE7D5-CF57-46EF-B807-FDD0502418D4}" type="datetimeFigureOut">
               <a:rPr lang="en-US" smtClean="0"/>
-              <a:t>5/20/2026</a:t>
+              <a:t>10/7/2026</a:t>
             </a:fld>
             <a:endParaRPr lang="en-US"/>
           </a:p>
@@ -1704,7 +1704,7 @@
           <a:p>
             <a:fld id="{846CE7D5-CF57-46EF-B807-FDD0502418D4}" type="datetimeFigureOut">
               <a:rPr lang="en-US" smtClean="0"/>
-              <a:t>5/20/2026</a:t>
+              <a:t>10/7/2026</a:t>
             </a:fld>
             <a:endParaRPr lang="en-US"/>
           </a:p>
@@ -2071,7 +2071,7 @@
           <a:p>
             <a:fld id="{846CE7D5-CF57-46EF-B807-FDD0502418D4}" type="datetimeFigureOut">
               <a:rPr lang="en-US" smtClean="0"/>
-              <a:t>5/20/2026</a:t>
+              <a:t>10/7/2026</a:t>
             </a:fld>
             <a:endParaRPr lang="en-US"/>
           </a:p>
@@ -2189,7 +2189,7 @@
           <a:p>
             <a:fld id="{846CE7D5-CF57-46EF-B807-FDD0502418D4}" type="datetimeFigureOut">
               <a:rPr lang="en-US" smtClean="0"/>
-              <a:t>5/20/2026</a:t>
+              <a:t>10/7/2026</a:t>
             </a:fld>
             <a:endParaRPr lang="en-US"/>
           </a:p>
@@ -2284,7 +2284,7 @@
           <a:p>
             <a:fld id="{846CE7D5-CF57-46EF-B807-FDD0502418D4}" type="datetimeFigureOut">
               <a:rPr lang="en-US" smtClean="0"/>
-              <a:t>5/20/2026</a:t>
+              <a:t>10/7/2026</a:t>
             </a:fld>
             <a:endParaRPr lang="en-US"/>
           </a:p>
@@ -2561,7 +2561,7 @@
           <a:p>
             <a:fld id="{846CE7D5-CF57-46EF-B807-FDD0502418D4}" type="datetimeFigureOut">
               <a:rPr lang="en-US" smtClean="0"/>
-              <a:t>5/20/2026</a:t>
+              <a:t>10/7/2026</a:t>
             </a:fld>
             <a:endParaRPr lang="en-US"/>
           </a:p>
@@ -2818,7 +2818,7 @@
           <a:p>
             <a:fld id="{846CE7D5-CF57-46EF-B807-FDD0502418D4}" type="datetimeFigureOut">
               <a:rPr lang="en-US" smtClean="0"/>
-              <a:t>5/20/2026</a:t>
+              <a:t>10/7/2026</a:t>
             </a:fld>
             <a:endParaRPr lang="en-US"/>
           </a:p>
@@ -3031,7 +3031,7 @@
           <a:p>
             <a:fld id="{846CE7D5-CF57-46EF-B807-FDD0502418D4}" type="datetimeFigureOut">
               <a:rPr lang="en-US" smtClean="0"/>
-              <a:t>5/20/2026</a:t>
+              <a:t>10/7/2026</a:t>
             </a:fld>
             <a:endParaRPr lang="en-US"/>
           </a:p>
@@ -4815,7 +4815,7 @@
             </a:pPr>
             <a:r>
               <a:rPr lang="en-US" dirty="0"/>
-              <a:t>animation=   </a:t>
+              <a:t>animation= "</a:t>
             </a:r>
             <a:r>
               <a:rPr lang="en-US" dirty="0">
@@ -4823,7 +4823,7 @@
                   <a:srgbClr val="0070C0"/>
                 </a:solidFill>
               </a:rPr>
-              <a:t>“property: rotation; </a:t>
+              <a:t>property: rotation; </a:t>
             </a:r>
           </a:p>
           <a:p>
@@ -4894,7 +4894,19 @@
                   <a:srgbClr val="0070C0"/>
                 </a:solidFill>
               </a:rPr>
-              <a:t> 0;   </a:t>
+              <a:t> 0; </a:t>
+            </a:r>
+            <a:r>
+              <a:rPr lang="en-US" dirty="0"/>
+              <a:t>"</a:t>
+            </a:r>
+            <a:r>
+              <a:rPr lang="en-US" dirty="0">
+                <a:solidFill>
+                  <a:srgbClr val="0070C0"/>
+                </a:solidFill>
+              </a:rPr>
+              <a:t>  </a:t>
             </a:r>
           </a:p>
           <a:p>
@@ -5061,10 +5073,7 @@
                 <a:pPr/>
                 <a14:m>
                   <m:oMathPara xmlns:m="http://schemas.openxmlformats.org/officeDocument/2006/math">
-                    <m:oMathParaPr>
-                      <m:jc m:val="centerGroup"/>
-                    </m:oMathParaPr>
-                    <m:oMath xmlns:m="http://schemas.openxmlformats.org/officeDocument/2006/math">
+                    <m:oMath>
                       <m:r>
                         <a:rPr lang="en-US" sz="3600" b="0" i="1" smtClean="0">
                           <a:latin typeface="Cambria Math" panose="02040503050406030204" pitchFamily="18" charset="0"/>
@@ -5157,10 +5166,7 @@
                 <a:pPr/>
                 <a14:m>
                   <m:oMathPara xmlns:m="http://schemas.openxmlformats.org/officeDocument/2006/math">
-                    <m:oMathParaPr>
-                      <m:jc m:val="centerGroup"/>
-                    </m:oMathParaPr>
-                    <m:oMath xmlns:m="http://schemas.openxmlformats.org/officeDocument/2006/math">
+                    <m:oMath>
                       <m:r>
                         <a:rPr lang="en-US" sz="3600" b="0" i="1" smtClean="0">
                           <a:latin typeface="Cambria Math" panose="02040503050406030204" pitchFamily="18" charset="0"/>
@@ -5340,10 +5346,7 @@
                 <a:pPr/>
                 <a14:m>
                   <m:oMathPara xmlns:m="http://schemas.openxmlformats.org/officeDocument/2006/math">
-                    <m:oMathParaPr>
-                      <m:jc m:val="centerGroup"/>
-                    </m:oMathParaPr>
-                    <m:oMath xmlns:m="http://schemas.openxmlformats.org/officeDocument/2006/math">
+                    <m:oMath>
                       <m:r>
                         <a:rPr lang="en-US" sz="3600" b="0" i="1" smtClean="0">
                           <a:solidFill>
@@ -5617,7 +5620,7 @@
             </a:pPr>
             <a:r>
               <a:rPr lang="en-US" dirty="0"/>
-              <a:t>	animation=   </a:t>
+              <a:t>	animation=  "</a:t>
             </a:r>
             <a:r>
               <a:rPr lang="en-US" dirty="0">
@@ -5625,7 +5628,7 @@
                   <a:srgbClr val="0070C0"/>
                 </a:solidFill>
               </a:rPr>
-              <a:t>'property: </a:t>
+              <a:t>property: </a:t>
             </a:r>
             <a:r>
               <a:rPr lang="en-US" u="sng" dirty="0">
@@ -5771,8 +5774,17 @@
                   <a:srgbClr val="0070C0"/>
                 </a:solidFill>
               </a:rPr>
-              <a:t>			loop: true;'</a:t>
-            </a:r>
+              <a:t>			loop: true;</a:t>
+            </a:r>
+            <a:r>
+              <a:rPr lang="en-US" dirty="0"/>
+              <a:t>"</a:t>
+            </a:r>
+            <a:endParaRPr lang="en-US" dirty="0">
+              <a:solidFill>
+                <a:srgbClr val="0070C0"/>
+              </a:solidFill>
+            </a:endParaRPr>
           </a:p>
           <a:p>
             <a:pPr marL="0" indent="0">
@@ -6275,10 +6287,7 @@
                 <a:pPr/>
                 <a14:m>
                   <m:oMathPara xmlns:m="http://schemas.openxmlformats.org/officeDocument/2006/math">
-                    <m:oMathParaPr>
-                      <m:jc m:val="centerGroup"/>
-                    </m:oMathParaPr>
-                    <m:oMath xmlns:m="http://schemas.openxmlformats.org/officeDocument/2006/math">
+                    <m:oMath>
                       <m:r>
                         <a:rPr lang="en-US" sz="3200" i="1" dirty="0" smtClean="0">
                           <a:latin typeface="Cambria Math" panose="02040503050406030204" pitchFamily="18" charset="0"/>
@@ -6395,10 +6404,7 @@
                 <a:pPr/>
                 <a14:m>
                   <m:oMathPara xmlns:m="http://schemas.openxmlformats.org/officeDocument/2006/math">
-                    <m:oMathParaPr>
-                      <m:jc m:val="centerGroup"/>
-                    </m:oMathParaPr>
-                    <m:oMath xmlns:m="http://schemas.openxmlformats.org/officeDocument/2006/math">
+                    <m:oMath>
                       <m:r>
                         <a:rPr lang="en-US" sz="3600" i="1" dirty="0" smtClean="0">
                           <a:latin typeface="Cambria Math" panose="02040503050406030204" pitchFamily="18" charset="0"/>
@@ -6491,10 +6497,7 @@
                 <a:pPr/>
                 <a14:m>
                   <m:oMathPara xmlns:m="http://schemas.openxmlformats.org/officeDocument/2006/math">
-                    <m:oMathParaPr>
-                      <m:jc m:val="centerGroup"/>
-                    </m:oMathParaPr>
-                    <m:oMath xmlns:m="http://schemas.openxmlformats.org/officeDocument/2006/math">
+                    <m:oMath>
                       <m:r>
                         <a:rPr lang="en-US" sz="2400" b="0" i="1" smtClean="0">
                           <a:latin typeface="Cambria Math" panose="02040503050406030204" pitchFamily="18" charset="0"/>
@@ -6693,10 +6696,7 @@
                 <a:pPr/>
                 <a14:m>
                   <m:oMathPara xmlns:m="http://schemas.openxmlformats.org/officeDocument/2006/math">
-                    <m:oMathParaPr>
-                      <m:jc m:val="centerGroup"/>
-                    </m:oMathParaPr>
-                    <m:oMath xmlns:m="http://schemas.openxmlformats.org/officeDocument/2006/math">
+                    <m:oMath>
                       <m:r>
                         <a:rPr lang="en-US" sz="2400" b="0" i="1" smtClean="0">
                           <a:latin typeface="Cambria Math" panose="02040503050406030204" pitchFamily="18" charset="0"/>
@@ -6921,10 +6921,7 @@
                 <a:pPr/>
                 <a14:m>
                   <m:oMathPara xmlns:m="http://schemas.openxmlformats.org/officeDocument/2006/math">
-                    <m:oMathParaPr>
-                      <m:jc m:val="centerGroup"/>
-                    </m:oMathParaPr>
-                    <m:oMath xmlns:m="http://schemas.openxmlformats.org/officeDocument/2006/math">
+                    <m:oMath>
                       <m:r>
                         <a:rPr lang="en-US" sz="2400" b="0" i="1" smtClean="0">
                           <a:latin typeface="Cambria Math" panose="02040503050406030204" pitchFamily="18" charset="0"/>
@@ -7123,10 +7120,7 @@
                 <a:pPr/>
                 <a14:m>
                   <m:oMathPara xmlns:m="http://schemas.openxmlformats.org/officeDocument/2006/math">
-                    <m:oMathParaPr>
-                      <m:jc m:val="centerGroup"/>
-                    </m:oMathParaPr>
-                    <m:oMath xmlns:m="http://schemas.openxmlformats.org/officeDocument/2006/math">
+                    <m:oMath>
                       <m:r>
                         <a:rPr lang="en-US" sz="2400" b="0" i="1" smtClean="0">
                           <a:latin typeface="Cambria Math" panose="02040503050406030204" pitchFamily="18" charset="0"/>
@@ -7287,10 +7281,7 @@
                 <a:pPr/>
                 <a14:m>
                   <m:oMathPara xmlns:m="http://schemas.openxmlformats.org/officeDocument/2006/math">
-                    <m:oMathParaPr>
-                      <m:jc m:val="centerGroup"/>
-                    </m:oMathParaPr>
-                    <m:oMath xmlns:m="http://schemas.openxmlformats.org/officeDocument/2006/math">
+                    <m:oMath>
                       <m:r>
                         <a:rPr lang="en-US" sz="2400" b="0" i="1" smtClean="0">
                           <a:latin typeface="Cambria Math" panose="02040503050406030204" pitchFamily="18" charset="0"/>
@@ -7507,10 +7498,7 @@
                   <a:pPr/>
                   <a14:m>
                     <m:oMathPara xmlns:m="http://schemas.openxmlformats.org/officeDocument/2006/math">
-                      <m:oMathParaPr>
-                        <m:jc m:val="centerGroup"/>
-                      </m:oMathParaPr>
-                      <m:oMath xmlns:m="http://schemas.openxmlformats.org/officeDocument/2006/math">
+                      <m:oMath>
                         <m:r>
                           <a:rPr lang="en-US" sz="2400" b="0" i="1" dirty="0" smtClean="0">
                             <a:latin typeface="Cambria Math" panose="02040503050406030204" pitchFamily="18" charset="0"/>
@@ -8153,7 +8141,7 @@
             </a:pPr>
             <a:r>
               <a:rPr lang="en-US" dirty="0"/>
-              <a:t>	animation='property: </a:t>
+              <a:t>	animation= "property: </a:t>
             </a:r>
             <a:r>
               <a:rPr lang="en-US" dirty="0">
@@ -8191,7 +8179,7 @@
             </a:pPr>
             <a:r>
               <a:rPr lang="en-US" dirty="0"/>
-              <a:t>	loop: true;'</a:t>
+              <a:t>	loop: true;"</a:t>
             </a:r>
           </a:p>
           <a:p>
@@ -9239,7 +9227,7 @@
             </a:pPr>
             <a:r>
               <a:rPr lang="en-US" dirty="0"/>
-              <a:t>      </a:t>
+              <a:t>	      </a:t>
             </a:r>
             <a:r>
               <a:rPr lang="en-US" b="1" dirty="0">
@@ -9247,7 +9235,11 @@
                   <a:srgbClr val="0070C0"/>
                 </a:solidFill>
               </a:rPr>
-              <a:t>&lt;a-box position=“</a:t>
+              <a:t>&lt;a-box position=</a:t>
+            </a:r>
+            <a:r>
+              <a:rPr lang="en-US" dirty="0"/>
+              <a:t>"</a:t>
             </a:r>
             <a:r>
               <a:rPr lang="en-US" dirty="0">
@@ -9278,12 +9270,40 @@
               <a:t>-2.0</a:t>
             </a:r>
             <a:r>
+              <a:rPr lang="en-US" dirty="0"/>
+              <a:t>"</a:t>
+            </a:r>
+            <a:r>
               <a:rPr lang="en-US" b="1" dirty="0">
                 <a:solidFill>
                   <a:srgbClr val="0070C0"/>
                 </a:solidFill>
               </a:rPr>
-              <a:t>” color=“red"&gt;&lt;/a-box&gt;</a:t>
+              <a:t>  color=</a:t>
+            </a:r>
+            <a:r>
+              <a:rPr lang="en-US" dirty="0"/>
+              <a:t>"</a:t>
+            </a:r>
+            <a:r>
+              <a:rPr lang="en-US" b="1" dirty="0">
+                <a:solidFill>
+                  <a:srgbClr val="0070C0"/>
+                </a:solidFill>
+              </a:rPr>
+              <a:t>red</a:t>
+            </a:r>
+            <a:r>
+              <a:rPr lang="en-US" dirty="0"/>
+              <a:t>"</a:t>
+            </a:r>
+            <a:r>
+              <a:rPr lang="en-US" b="1" dirty="0">
+                <a:solidFill>
+                  <a:srgbClr val="0070C0"/>
+                </a:solidFill>
+              </a:rPr>
+              <a:t>&gt;&lt;/a-box&gt;</a:t>
             </a:r>
           </a:p>
           <a:p>
@@ -9629,10 +9649,7 @@
                 <a:pPr/>
                 <a14:m>
                   <m:oMathPara xmlns:m="http://schemas.openxmlformats.org/officeDocument/2006/math">
-                    <m:oMathParaPr>
-                      <m:jc m:val="centerGroup"/>
-                    </m:oMathParaPr>
-                    <m:oMath xmlns:m="http://schemas.openxmlformats.org/officeDocument/2006/math">
+                    <m:oMath>
                       <m:r>
                         <a:rPr lang="en-US" sz="3600" b="0" i="1" smtClean="0">
                           <a:latin typeface="Cambria Math" panose="02040503050406030204" pitchFamily="18" charset="0"/>
@@ -9725,10 +9742,7 @@
                 <a:pPr/>
                 <a14:m>
                   <m:oMathPara xmlns:m="http://schemas.openxmlformats.org/officeDocument/2006/math">
-                    <m:oMathParaPr>
-                      <m:jc m:val="centerGroup"/>
-                    </m:oMathParaPr>
-                    <m:oMath xmlns:m="http://schemas.openxmlformats.org/officeDocument/2006/math">
+                    <m:oMath>
                       <m:r>
                         <a:rPr lang="en-US" sz="3600" b="0" i="1" smtClean="0">
                           <a:latin typeface="Cambria Math" panose="02040503050406030204" pitchFamily="18" charset="0"/>
@@ -9901,10 +9915,7 @@
                 <a:pPr/>
                 <a14:m>
                   <m:oMathPara xmlns:m="http://schemas.openxmlformats.org/officeDocument/2006/math">
-                    <m:oMathParaPr>
-                      <m:jc m:val="centerGroup"/>
-                    </m:oMathParaPr>
-                    <m:oMath xmlns:m="http://schemas.openxmlformats.org/officeDocument/2006/math">
+                    <m:oMath>
                       <m:r>
                         <a:rPr lang="en-US" sz="3600" b="0" i="1" smtClean="0">
                           <a:solidFill>
@@ -10518,10 +10529,7 @@
                 <a:pPr/>
                 <a14:m>
                   <m:oMathPara xmlns:m="http://schemas.openxmlformats.org/officeDocument/2006/math">
-                    <m:oMathParaPr>
-                      <m:jc m:val="centerGroup"/>
-                    </m:oMathParaPr>
-                    <m:oMath xmlns:m="http://schemas.openxmlformats.org/officeDocument/2006/math">
+                    <m:oMath>
                       <m:r>
                         <a:rPr lang="en-US" sz="3600" b="0" i="1" smtClean="0">
                           <a:latin typeface="Cambria Math" panose="02040503050406030204" pitchFamily="18" charset="0"/>
@@ -10614,10 +10622,7 @@
                 <a:pPr/>
                 <a14:m>
                   <m:oMathPara xmlns:m="http://schemas.openxmlformats.org/officeDocument/2006/math">
-                    <m:oMathParaPr>
-                      <m:jc m:val="centerGroup"/>
-                    </m:oMathParaPr>
-                    <m:oMath xmlns:m="http://schemas.openxmlformats.org/officeDocument/2006/math">
+                    <m:oMath>
                       <m:r>
                         <a:rPr lang="en-US" sz="3600" b="0" i="1" smtClean="0">
                           <a:latin typeface="Cambria Math" panose="02040503050406030204" pitchFamily="18" charset="0"/>
@@ -10790,10 +10795,7 @@
                 <a:pPr/>
                 <a14:m>
                   <m:oMathPara xmlns:m="http://schemas.openxmlformats.org/officeDocument/2006/math">
-                    <m:oMathParaPr>
-                      <m:jc m:val="centerGroup"/>
-                    </m:oMathParaPr>
-                    <m:oMath xmlns:m="http://schemas.openxmlformats.org/officeDocument/2006/math">
+                    <m:oMath>
                       <m:r>
                         <a:rPr lang="en-US" sz="3600" b="0" i="1" smtClean="0">
                           <a:solidFill>
@@ -11629,12 +11631,9 @@
             </a:r>
           </a:p>
           <a:p>
-            <a:pPr marL="0" indent="0">
-              <a:buNone/>
-            </a:pPr>
             <a:r>
               <a:rPr lang="en-US" dirty="0"/>
-              <a:t>	animation=   </a:t>
+              <a:t>	animation=   "</a:t>
             </a:r>
             <a:r>
               <a:rPr lang="en-US" dirty="0">
@@ -11642,7 +11641,7 @@
                   <a:srgbClr val="0070C0"/>
                 </a:solidFill>
               </a:rPr>
-              <a:t>“property: rotation; </a:t>
+              <a:t>property: rotation; </a:t>
             </a:r>
           </a:p>
           <a:p>
@@ -11735,17 +11734,23 @@
             </a:r>
           </a:p>
           <a:p>
-            <a:pPr marL="0" indent="0">
-              <a:buNone/>
-            </a:pPr>
             <a:r>
               <a:rPr lang="en-US" dirty="0">
                 <a:solidFill>
                   <a:srgbClr val="0070C0"/>
                 </a:solidFill>
               </a:rPr>
-              <a:t>			loop: true;”</a:t>
-            </a:r>
+              <a:t>			loop: true;</a:t>
+            </a:r>
+            <a:r>
+              <a:rPr lang="en-US" dirty="0"/>
+              <a:t>"</a:t>
+            </a:r>
+            <a:endParaRPr lang="en-US" dirty="0">
+              <a:solidFill>
+                <a:srgbClr val="0070C0"/>
+              </a:solidFill>
+            </a:endParaRPr>
           </a:p>
           <a:p>
             <a:pPr marL="0" indent="0">

--- a/p04/A-frame-moving-geometric-objects.pptx
+++ b/p04/A-frame-moving-geometric-objects.pptx
@@ -5,7 +5,7 @@
     <p:sldMasterId id="2147483660" r:id="rId1"/>
   </p:sldMasterIdLst>
   <p:notesMasterIdLst>
-    <p:notesMasterId r:id="rId22"/>
+    <p:notesMasterId r:id="rId23"/>
   </p:notesMasterIdLst>
   <p:sldIdLst>
     <p:sldId id="297" r:id="rId2"/>
@@ -23,11 +23,12 @@
     <p:sldId id="301" r:id="rId14"/>
     <p:sldId id="302" r:id="rId15"/>
     <p:sldId id="288" r:id="rId16"/>
-    <p:sldId id="303" r:id="rId17"/>
-    <p:sldId id="287" r:id="rId18"/>
-    <p:sldId id="299" r:id="rId19"/>
-    <p:sldId id="284" r:id="rId20"/>
-    <p:sldId id="293" r:id="rId21"/>
+    <p:sldId id="304" r:id="rId17"/>
+    <p:sldId id="303" r:id="rId18"/>
+    <p:sldId id="287" r:id="rId19"/>
+    <p:sldId id="299" r:id="rId20"/>
+    <p:sldId id="284" r:id="rId21"/>
+    <p:sldId id="293" r:id="rId22"/>
   </p:sldIdLst>
   <p:sldSz cx="12192000" cy="6858000"/>
   <p:notesSz cx="7019925" cy="9305925"/>
@@ -224,7 +225,7 @@
           <a:p>
             <a:fld id="{FA1E3CD0-6E24-4AC0-945A-82AEC1490673}" type="datetimeFigureOut">
               <a:rPr lang="en-US" smtClean="0"/>
-              <a:t>10/7/2026</a:t>
+              <a:t>10/8/2026</a:t>
             </a:fld>
             <a:endParaRPr lang="en-US"/>
           </a:p>
@@ -706,7 +707,7 @@
           <a:p>
             <a:fld id="{846CE7D5-CF57-46EF-B807-FDD0502418D4}" type="datetimeFigureOut">
               <a:rPr lang="en-US" smtClean="0"/>
-              <a:t>10/7/2026</a:t>
+              <a:t>10/8/2026</a:t>
             </a:fld>
             <a:endParaRPr lang="en-US"/>
           </a:p>
@@ -876,7 +877,7 @@
           <a:p>
             <a:fld id="{846CE7D5-CF57-46EF-B807-FDD0502418D4}" type="datetimeFigureOut">
               <a:rPr lang="en-US" smtClean="0"/>
-              <a:t>10/7/2026</a:t>
+              <a:t>10/8/2026</a:t>
             </a:fld>
             <a:endParaRPr lang="en-US"/>
           </a:p>
@@ -1056,7 +1057,7 @@
           <a:p>
             <a:fld id="{846CE7D5-CF57-46EF-B807-FDD0502418D4}" type="datetimeFigureOut">
               <a:rPr lang="en-US" smtClean="0"/>
-              <a:t>10/7/2026</a:t>
+              <a:t>10/8/2026</a:t>
             </a:fld>
             <a:endParaRPr lang="en-US"/>
           </a:p>
@@ -1226,7 +1227,7 @@
           <a:p>
             <a:fld id="{846CE7D5-CF57-46EF-B807-FDD0502418D4}" type="datetimeFigureOut">
               <a:rPr lang="en-US" smtClean="0"/>
-              <a:t>10/7/2026</a:t>
+              <a:t>10/8/2026</a:t>
             </a:fld>
             <a:endParaRPr lang="en-US"/>
           </a:p>
@@ -1472,7 +1473,7 @@
           <a:p>
             <a:fld id="{846CE7D5-CF57-46EF-B807-FDD0502418D4}" type="datetimeFigureOut">
               <a:rPr lang="en-US" smtClean="0"/>
-              <a:t>10/7/2026</a:t>
+              <a:t>10/8/2026</a:t>
             </a:fld>
             <a:endParaRPr lang="en-US"/>
           </a:p>
@@ -1704,7 +1705,7 @@
           <a:p>
             <a:fld id="{846CE7D5-CF57-46EF-B807-FDD0502418D4}" type="datetimeFigureOut">
               <a:rPr lang="en-US" smtClean="0"/>
-              <a:t>10/7/2026</a:t>
+              <a:t>10/8/2026</a:t>
             </a:fld>
             <a:endParaRPr lang="en-US"/>
           </a:p>
@@ -2071,7 +2072,7 @@
           <a:p>
             <a:fld id="{846CE7D5-CF57-46EF-B807-FDD0502418D4}" type="datetimeFigureOut">
               <a:rPr lang="en-US" smtClean="0"/>
-              <a:t>10/7/2026</a:t>
+              <a:t>10/8/2026</a:t>
             </a:fld>
             <a:endParaRPr lang="en-US"/>
           </a:p>
@@ -2189,7 +2190,7 @@
           <a:p>
             <a:fld id="{846CE7D5-CF57-46EF-B807-FDD0502418D4}" type="datetimeFigureOut">
               <a:rPr lang="en-US" smtClean="0"/>
-              <a:t>10/7/2026</a:t>
+              <a:t>10/8/2026</a:t>
             </a:fld>
             <a:endParaRPr lang="en-US"/>
           </a:p>
@@ -2284,7 +2285,7 @@
           <a:p>
             <a:fld id="{846CE7D5-CF57-46EF-B807-FDD0502418D4}" type="datetimeFigureOut">
               <a:rPr lang="en-US" smtClean="0"/>
-              <a:t>10/7/2026</a:t>
+              <a:t>10/8/2026</a:t>
             </a:fld>
             <a:endParaRPr lang="en-US"/>
           </a:p>
@@ -2561,7 +2562,7 @@
           <a:p>
             <a:fld id="{846CE7D5-CF57-46EF-B807-FDD0502418D4}" type="datetimeFigureOut">
               <a:rPr lang="en-US" smtClean="0"/>
-              <a:t>10/7/2026</a:t>
+              <a:t>10/8/2026</a:t>
             </a:fld>
             <a:endParaRPr lang="en-US"/>
           </a:p>
@@ -2818,7 +2819,7 @@
           <a:p>
             <a:fld id="{846CE7D5-CF57-46EF-B807-FDD0502418D4}" type="datetimeFigureOut">
               <a:rPr lang="en-US" smtClean="0"/>
-              <a:t>10/7/2026</a:t>
+              <a:t>10/8/2026</a:t>
             </a:fld>
             <a:endParaRPr lang="en-US"/>
           </a:p>
@@ -3031,7 +3032,7 @@
           <a:p>
             <a:fld id="{846CE7D5-CF57-46EF-B807-FDD0502418D4}" type="datetimeFigureOut">
               <a:rPr lang="en-US" smtClean="0"/>
-              <a:t>10/7/2026</a:t>
+              <a:t>10/8/2026</a:t>
             </a:fld>
             <a:endParaRPr lang="en-US"/>
           </a:p>
@@ -8057,6 +8058,94 @@
           <p:cNvPr id="2" name="Title 1">
             <a:extLst>
               <a:ext uri="{FF2B5EF4-FFF2-40B4-BE49-F238E27FC236}">
+                <a16:creationId xmlns:a16="http://schemas.microsoft.com/office/drawing/2014/main" id="{96316959-58F6-7885-E0C1-4606C4B4D8C4}"/>
+              </a:ext>
+            </a:extLst>
+          </p:cNvPr>
+          <p:cNvSpPr>
+            <a:spLocks noGrp="1"/>
+          </p:cNvSpPr>
+          <p:nvPr>
+            <p:ph type="title"/>
+          </p:nvPr>
+        </p:nvSpPr>
+        <p:spPr/>
+        <p:txBody>
+          <a:bodyPr/>
+          <a:lstStyle/>
+          <a:p>
+            <a:r>
+              <a:rPr lang="en-US" dirty="0"/>
+              <a:t>AI Example</a:t>
+            </a:r>
+          </a:p>
+        </p:txBody>
+      </p:sp>
+      <p:pic>
+        <p:nvPicPr>
+          <p:cNvPr id="5" name="Picture 4">
+            <a:extLst>
+              <a:ext uri="{FF2B5EF4-FFF2-40B4-BE49-F238E27FC236}">
+                <a16:creationId xmlns:a16="http://schemas.microsoft.com/office/drawing/2014/main" id="{B7B8D476-46AD-8C64-07C0-76DE16EB2628}"/>
+              </a:ext>
+            </a:extLst>
+          </p:cNvPr>
+          <p:cNvPicPr>
+            <a:picLocks noChangeAspect="1"/>
+          </p:cNvPicPr>
+          <p:nvPr/>
+        </p:nvPicPr>
+        <p:blipFill>
+          <a:blip r:embed="rId2"/>
+          <a:stretch>
+            <a:fillRect/>
+          </a:stretch>
+        </p:blipFill>
+        <p:spPr>
+          <a:xfrm>
+            <a:off x="1298593" y="2616632"/>
+            <a:ext cx="9468824" cy="2550525"/>
+          </a:xfrm>
+          <a:prstGeom prst="rect">
+            <a:avLst/>
+          </a:prstGeom>
+        </p:spPr>
+      </p:pic>
+    </p:spTree>
+    <p:extLst>
+      <p:ext uri="{BB962C8B-B14F-4D97-AF65-F5344CB8AC3E}">
+        <p14:creationId xmlns:p14="http://schemas.microsoft.com/office/powerpoint/2010/main" val="1733797470"/>
+      </p:ext>
+    </p:extLst>
+  </p:cSld>
+  <p:clrMapOvr>
+    <a:masterClrMapping/>
+  </p:clrMapOvr>
+</p:sld>
+</file>
+
+<file path=ppt/slides/slide17.xml><?xml version="1.0" encoding="utf-8"?>
+<p:sld xmlns:a="http://schemas.openxmlformats.org/drawingml/2006/main" xmlns:r="http://schemas.openxmlformats.org/officeDocument/2006/relationships" xmlns:p="http://schemas.openxmlformats.org/presentationml/2006/main">
+  <p:cSld>
+    <p:spTree>
+      <p:nvGrpSpPr>
+        <p:cNvPr id="1" name=""/>
+        <p:cNvGrpSpPr/>
+        <p:nvPr/>
+      </p:nvGrpSpPr>
+      <p:grpSpPr>
+        <a:xfrm>
+          <a:off x="0" y="0"/>
+          <a:ext cx="0" cy="0"/>
+          <a:chOff x="0" y="0"/>
+          <a:chExt cx="0" cy="0"/>
+        </a:xfrm>
+      </p:grpSpPr>
+      <p:sp>
+        <p:nvSpPr>
+          <p:cNvPr id="2" name="Title 1">
+            <a:extLst>
+              <a:ext uri="{FF2B5EF4-FFF2-40B4-BE49-F238E27FC236}">
                 <a16:creationId xmlns:a16="http://schemas.microsoft.com/office/drawing/2014/main" id="{DE2C3538-B5E7-0AC3-9195-4B860FE9663C}"/>
               </a:ext>
             </a:extLst>
@@ -8206,7 +8295,7 @@
 </p:sld>
 </file>
 
-<file path=ppt/slides/slide17.xml><?xml version="1.0" encoding="utf-8"?>
+<file path=ppt/slides/slide18.xml><?xml version="1.0" encoding="utf-8"?>
 <p:sld xmlns:a="http://schemas.openxmlformats.org/drawingml/2006/main" xmlns:r="http://schemas.openxmlformats.org/officeDocument/2006/relationships" xmlns:p="http://schemas.openxmlformats.org/presentationml/2006/main">
   <p:cSld>
     <p:spTree>
@@ -8379,7 +8468,7 @@
 </p:sld>
 </file>
 
-<file path=ppt/slides/slide18.xml><?xml version="1.0" encoding="utf-8"?>
+<file path=ppt/slides/slide19.xml><?xml version="1.0" encoding="utf-8"?>
 <p:sld xmlns:a="http://schemas.openxmlformats.org/drawingml/2006/main" xmlns:r="http://schemas.openxmlformats.org/officeDocument/2006/relationships" xmlns:p="http://schemas.openxmlformats.org/presentationml/2006/main">
   <p:cSld>
     <p:spTree>
@@ -8543,298 +8632,6 @@
 </p:sld>
 </file>
 
-<file path=ppt/slides/slide19.xml><?xml version="1.0" encoding="utf-8"?>
-<p:sld xmlns:a="http://schemas.openxmlformats.org/drawingml/2006/main" xmlns:r="http://schemas.openxmlformats.org/officeDocument/2006/relationships" xmlns:p="http://schemas.openxmlformats.org/presentationml/2006/main">
-  <p:cSld>
-    <p:spTree>
-      <p:nvGrpSpPr>
-        <p:cNvPr id="1" name=""/>
-        <p:cNvGrpSpPr/>
-        <p:nvPr/>
-      </p:nvGrpSpPr>
-      <p:grpSpPr>
-        <a:xfrm>
-          <a:off x="0" y="0"/>
-          <a:ext cx="0" cy="0"/>
-          <a:chOff x="0" y="0"/>
-          <a:chExt cx="0" cy="0"/>
-        </a:xfrm>
-      </p:grpSpPr>
-      <p:sp>
-        <p:nvSpPr>
-          <p:cNvPr id="2" name="Title 1">
-            <a:extLst>
-              <a:ext uri="{FF2B5EF4-FFF2-40B4-BE49-F238E27FC236}">
-                <a16:creationId xmlns:a16="http://schemas.microsoft.com/office/drawing/2014/main" id="{DCD17752-E8BF-C7EB-C6AF-225EEC3F5FBB}"/>
-              </a:ext>
-            </a:extLst>
-          </p:cNvPr>
-          <p:cNvSpPr>
-            <a:spLocks noGrp="1"/>
-          </p:cNvSpPr>
-          <p:nvPr>
-            <p:ph type="title"/>
-          </p:nvPr>
-        </p:nvSpPr>
-        <p:spPr/>
-        <p:txBody>
-          <a:bodyPr/>
-          <a:lstStyle/>
-          <a:p>
-            <a:r>
-              <a:rPr lang="en-US" dirty="0"/>
-              <a:t>Multi animations</a:t>
-            </a:r>
-          </a:p>
-        </p:txBody>
-      </p:sp>
-      <p:sp>
-        <p:nvSpPr>
-          <p:cNvPr id="3" name="Content Placeholder 2">
-            <a:extLst>
-              <a:ext uri="{FF2B5EF4-FFF2-40B4-BE49-F238E27FC236}">
-                <a16:creationId xmlns:a16="http://schemas.microsoft.com/office/drawing/2014/main" id="{5BD7B57F-8D99-5527-F23B-F92D6F854830}"/>
-              </a:ext>
-            </a:extLst>
-          </p:cNvPr>
-          <p:cNvSpPr>
-            <a:spLocks noGrp="1"/>
-          </p:cNvSpPr>
-          <p:nvPr>
-            <p:ph idx="1"/>
-          </p:nvPr>
-        </p:nvSpPr>
-        <p:spPr/>
-        <p:txBody>
-          <a:bodyPr>
-            <a:normAutofit/>
-          </a:bodyPr>
-          <a:lstStyle/>
-          <a:p>
-            <a:pPr marL="0" indent="0">
-              <a:buNone/>
-            </a:pPr>
-            <a:endParaRPr lang="en-US" sz="1600" dirty="0"/>
-          </a:p>
-          <a:p>
-            <a:pPr marL="0" indent="0">
-              <a:buNone/>
-            </a:pPr>
-            <a:endParaRPr lang="en-US" sz="1600" dirty="0"/>
-          </a:p>
-          <a:p>
-            <a:pPr marL="0" indent="0">
-              <a:buNone/>
-            </a:pPr>
-            <a:r>
-              <a:rPr lang="en-US" sz="1600" dirty="0"/>
-              <a:t>&lt;a-sphere </a:t>
-            </a:r>
-            <a:r>
-              <a:rPr lang="en-US" sz="1600" dirty="0" err="1"/>
-              <a:t>src</a:t>
-            </a:r>
-            <a:r>
-              <a:rPr lang="en-US" sz="1600" dirty="0"/>
-              <a:t>="#mars" radius="0.5" position="0  0.5  0" segments-height="53"</a:t>
-            </a:r>
-          </a:p>
-          <a:p>
-            <a:pPr marL="0" indent="0">
-              <a:buNone/>
-            </a:pPr>
-            <a:r>
-              <a:rPr lang="en-US" sz="1600" dirty="0"/>
-              <a:t>    animation='property: position; dur: 5000; from: </a:t>
-            </a:r>
-            <a:r>
-              <a:rPr lang="en-US" sz="1600" dirty="0">
-                <a:solidFill>
-                  <a:srgbClr val="FF0000"/>
-                </a:solidFill>
-              </a:rPr>
-              <a:t>-2  0.5  0</a:t>
-            </a:r>
-            <a:r>
-              <a:rPr lang="en-US" sz="1600" dirty="0"/>
-              <a:t>; to: </a:t>
-            </a:r>
-            <a:r>
-              <a:rPr lang="en-US" sz="1600" dirty="0">
-                <a:solidFill>
-                  <a:srgbClr val="FF0000"/>
-                </a:solidFill>
-              </a:rPr>
-              <a:t>2  0.5  0</a:t>
-            </a:r>
-            <a:r>
-              <a:rPr lang="en-US" sz="1600" dirty="0"/>
-              <a:t>;  </a:t>
-            </a:r>
-            <a:r>
-              <a:rPr lang="en-US" sz="1600" dirty="0" err="1"/>
-              <a:t>dir</a:t>
-            </a:r>
-            <a:r>
-              <a:rPr lang="en-US" sz="1600" dirty="0"/>
-              <a:t>: </a:t>
-            </a:r>
-            <a:r>
-              <a:rPr lang="en-US" sz="1600" dirty="0">
-                <a:solidFill>
-                  <a:srgbClr val="0070C0"/>
-                </a:solidFill>
-              </a:rPr>
-              <a:t>alternate</a:t>
-            </a:r>
-            <a:r>
-              <a:rPr lang="en-US" sz="1600" dirty="0"/>
-              <a:t>; easing: linear; loop: true;'</a:t>
-            </a:r>
-          </a:p>
-          <a:p>
-            <a:pPr marL="0" indent="0">
-              <a:buNone/>
-            </a:pPr>
-            <a:r>
-              <a:rPr lang="en-US" sz="1600" dirty="0"/>
-              <a:t>    animation__2='property: rotation; dur: 1000; from: </a:t>
-            </a:r>
-            <a:r>
-              <a:rPr lang="en-US" sz="1600" b="1" dirty="0"/>
-              <a:t>0 0 0</a:t>
-            </a:r>
-            <a:r>
-              <a:rPr lang="en-US" sz="1600" dirty="0"/>
-              <a:t>;    to: </a:t>
-            </a:r>
-            <a:r>
-              <a:rPr lang="en-US" sz="1600" b="1" dirty="0"/>
-              <a:t>0 360 0</a:t>
-            </a:r>
-            <a:r>
-              <a:rPr lang="en-US" sz="1600" dirty="0"/>
-              <a:t>; </a:t>
-            </a:r>
-            <a:r>
-              <a:rPr lang="en-US" sz="1600" dirty="0" err="1"/>
-              <a:t>dir</a:t>
-            </a:r>
-            <a:r>
-              <a:rPr lang="en-US" sz="1600" dirty="0"/>
-              <a:t>: </a:t>
-            </a:r>
-            <a:r>
-              <a:rPr lang="en-US" sz="1600" dirty="0">
-                <a:solidFill>
-                  <a:srgbClr val="0070C0"/>
-                </a:solidFill>
-              </a:rPr>
-              <a:t>normal</a:t>
-            </a:r>
-            <a:r>
-              <a:rPr lang="en-US" sz="1600" dirty="0"/>
-              <a:t>;    easing: linear; loop: true;'</a:t>
-            </a:r>
-          </a:p>
-          <a:p>
-            <a:pPr marL="0" indent="0">
-              <a:buNone/>
-            </a:pPr>
-            <a:r>
-              <a:rPr lang="en-US" sz="1600" dirty="0"/>
-              <a:t>    animation__3='property:  scale; dur: 1000; from: </a:t>
-            </a:r>
-            <a:r>
-              <a:rPr lang="en-US" sz="1600" b="1" dirty="0"/>
-              <a:t>1 1 1</a:t>
-            </a:r>
-            <a:r>
-              <a:rPr lang="en-US" sz="1600" dirty="0"/>
-              <a:t>;    to: </a:t>
-            </a:r>
-            <a:r>
-              <a:rPr lang="en-US" sz="1600" b="1" dirty="0"/>
-              <a:t>2 2 2</a:t>
-            </a:r>
-            <a:r>
-              <a:rPr lang="en-US" sz="1600" dirty="0"/>
-              <a:t>;   </a:t>
-            </a:r>
-            <a:r>
-              <a:rPr lang="en-US" sz="1600" dirty="0" err="1"/>
-              <a:t>dir</a:t>
-            </a:r>
-            <a:r>
-              <a:rPr lang="en-US" sz="1600" dirty="0"/>
-              <a:t>: </a:t>
-            </a:r>
-            <a:r>
-              <a:rPr lang="en-US" sz="1600" dirty="0">
-                <a:solidFill>
-                  <a:srgbClr val="0070C0"/>
-                </a:solidFill>
-              </a:rPr>
-              <a:t>alternate</a:t>
-            </a:r>
-            <a:r>
-              <a:rPr lang="en-US" sz="1600" dirty="0"/>
-              <a:t>; easing: linear; loop: true;'&gt;</a:t>
-            </a:r>
-          </a:p>
-          <a:p>
-            <a:pPr marL="0" indent="0">
-              <a:buNone/>
-            </a:pPr>
-            <a:r>
-              <a:rPr lang="en-US" sz="1600" dirty="0"/>
-              <a:t>&lt;/a-sphere&gt;</a:t>
-            </a:r>
-          </a:p>
-          <a:p>
-            <a:pPr marL="0" indent="0">
-              <a:buNone/>
-            </a:pPr>
-            <a:endParaRPr lang="en-US" sz="1600" dirty="0"/>
-          </a:p>
-          <a:p>
-            <a:pPr marL="0" indent="0">
-              <a:buNone/>
-            </a:pPr>
-            <a:endParaRPr lang="en-US" sz="1600" dirty="0"/>
-          </a:p>
-          <a:p>
-            <a:pPr marL="0" indent="0">
-              <a:buNone/>
-            </a:pPr>
-            <a:r>
-              <a:rPr lang="en-US" sz="2400" dirty="0"/>
-              <a:t>A</a:t>
-            </a:r>
-            <a:r>
-              <a:rPr lang="en-US" sz="2400"/>
-              <a:t>nimations </a:t>
-            </a:r>
-            <a:r>
-              <a:rPr lang="en-US" sz="2400" dirty="0"/>
-              <a:t>can change any property with a numeric / vector / color value</a:t>
-            </a:r>
-          </a:p>
-        </p:txBody>
-      </p:sp>
-    </p:spTree>
-    <p:extLst>
-      <p:ext uri="{BB962C8B-B14F-4D97-AF65-F5344CB8AC3E}">
-        <p14:creationId xmlns:p14="http://schemas.microsoft.com/office/powerpoint/2010/main" val="4092314294"/>
-      </p:ext>
-    </p:extLst>
-  </p:cSld>
-  <p:clrMapOvr>
-    <a:masterClrMapping/>
-  </p:clrMapOvr>
-</p:sld>
-</file>
-
 <file path=ppt/slides/slide2.xml><?xml version="1.0" encoding="utf-8"?>
 <p:sld xmlns:a="http://schemas.openxmlformats.org/drawingml/2006/main" xmlns:r="http://schemas.openxmlformats.org/officeDocument/2006/relationships" xmlns:p="http://schemas.openxmlformats.org/presentationml/2006/main">
   <p:cSld>
@@ -9015,6 +8812,298 @@
 </file>
 
 <file path=ppt/slides/slide20.xml><?xml version="1.0" encoding="utf-8"?>
+<p:sld xmlns:a="http://schemas.openxmlformats.org/drawingml/2006/main" xmlns:r="http://schemas.openxmlformats.org/officeDocument/2006/relationships" xmlns:p="http://schemas.openxmlformats.org/presentationml/2006/main">
+  <p:cSld>
+    <p:spTree>
+      <p:nvGrpSpPr>
+        <p:cNvPr id="1" name=""/>
+        <p:cNvGrpSpPr/>
+        <p:nvPr/>
+      </p:nvGrpSpPr>
+      <p:grpSpPr>
+        <a:xfrm>
+          <a:off x="0" y="0"/>
+          <a:ext cx="0" cy="0"/>
+          <a:chOff x="0" y="0"/>
+          <a:chExt cx="0" cy="0"/>
+        </a:xfrm>
+      </p:grpSpPr>
+      <p:sp>
+        <p:nvSpPr>
+          <p:cNvPr id="2" name="Title 1">
+            <a:extLst>
+              <a:ext uri="{FF2B5EF4-FFF2-40B4-BE49-F238E27FC236}">
+                <a16:creationId xmlns:a16="http://schemas.microsoft.com/office/drawing/2014/main" id="{DCD17752-E8BF-C7EB-C6AF-225EEC3F5FBB}"/>
+              </a:ext>
+            </a:extLst>
+          </p:cNvPr>
+          <p:cNvSpPr>
+            <a:spLocks noGrp="1"/>
+          </p:cNvSpPr>
+          <p:nvPr>
+            <p:ph type="title"/>
+          </p:nvPr>
+        </p:nvSpPr>
+        <p:spPr/>
+        <p:txBody>
+          <a:bodyPr/>
+          <a:lstStyle/>
+          <a:p>
+            <a:r>
+              <a:rPr lang="en-US" dirty="0"/>
+              <a:t>Multi animations</a:t>
+            </a:r>
+          </a:p>
+        </p:txBody>
+      </p:sp>
+      <p:sp>
+        <p:nvSpPr>
+          <p:cNvPr id="3" name="Content Placeholder 2">
+            <a:extLst>
+              <a:ext uri="{FF2B5EF4-FFF2-40B4-BE49-F238E27FC236}">
+                <a16:creationId xmlns:a16="http://schemas.microsoft.com/office/drawing/2014/main" id="{5BD7B57F-8D99-5527-F23B-F92D6F854830}"/>
+              </a:ext>
+            </a:extLst>
+          </p:cNvPr>
+          <p:cNvSpPr>
+            <a:spLocks noGrp="1"/>
+          </p:cNvSpPr>
+          <p:nvPr>
+            <p:ph idx="1"/>
+          </p:nvPr>
+        </p:nvSpPr>
+        <p:spPr/>
+        <p:txBody>
+          <a:bodyPr>
+            <a:normAutofit/>
+          </a:bodyPr>
+          <a:lstStyle/>
+          <a:p>
+            <a:pPr marL="0" indent="0">
+              <a:buNone/>
+            </a:pPr>
+            <a:endParaRPr lang="en-US" sz="1600" dirty="0"/>
+          </a:p>
+          <a:p>
+            <a:pPr marL="0" indent="0">
+              <a:buNone/>
+            </a:pPr>
+            <a:endParaRPr lang="en-US" sz="1600" dirty="0"/>
+          </a:p>
+          <a:p>
+            <a:pPr marL="0" indent="0">
+              <a:buNone/>
+            </a:pPr>
+            <a:r>
+              <a:rPr lang="en-US" sz="1600" dirty="0"/>
+              <a:t>&lt;a-sphere </a:t>
+            </a:r>
+            <a:r>
+              <a:rPr lang="en-US" sz="1600" dirty="0" err="1"/>
+              <a:t>src</a:t>
+            </a:r>
+            <a:r>
+              <a:rPr lang="en-US" sz="1600" dirty="0"/>
+              <a:t>="#mars" radius="0.5" position="0  0.5  0" segments-height="53"</a:t>
+            </a:r>
+          </a:p>
+          <a:p>
+            <a:pPr marL="0" indent="0">
+              <a:buNone/>
+            </a:pPr>
+            <a:r>
+              <a:rPr lang="en-US" sz="1600" dirty="0"/>
+              <a:t>    animation='property: position; dur: 5000; from: </a:t>
+            </a:r>
+            <a:r>
+              <a:rPr lang="en-US" sz="1600" dirty="0">
+                <a:solidFill>
+                  <a:srgbClr val="FF0000"/>
+                </a:solidFill>
+              </a:rPr>
+              <a:t>-2  0.5  0</a:t>
+            </a:r>
+            <a:r>
+              <a:rPr lang="en-US" sz="1600" dirty="0"/>
+              <a:t>; to: </a:t>
+            </a:r>
+            <a:r>
+              <a:rPr lang="en-US" sz="1600" dirty="0">
+                <a:solidFill>
+                  <a:srgbClr val="FF0000"/>
+                </a:solidFill>
+              </a:rPr>
+              <a:t>2  0.5  0</a:t>
+            </a:r>
+            <a:r>
+              <a:rPr lang="en-US" sz="1600" dirty="0"/>
+              <a:t>;  </a:t>
+            </a:r>
+            <a:r>
+              <a:rPr lang="en-US" sz="1600" dirty="0" err="1"/>
+              <a:t>dir</a:t>
+            </a:r>
+            <a:r>
+              <a:rPr lang="en-US" sz="1600" dirty="0"/>
+              <a:t>: </a:t>
+            </a:r>
+            <a:r>
+              <a:rPr lang="en-US" sz="1600" dirty="0">
+                <a:solidFill>
+                  <a:srgbClr val="0070C0"/>
+                </a:solidFill>
+              </a:rPr>
+              <a:t>alternate</a:t>
+            </a:r>
+            <a:r>
+              <a:rPr lang="en-US" sz="1600" dirty="0"/>
+              <a:t>; easing: linear; loop: true;'</a:t>
+            </a:r>
+          </a:p>
+          <a:p>
+            <a:pPr marL="0" indent="0">
+              <a:buNone/>
+            </a:pPr>
+            <a:r>
+              <a:rPr lang="en-US" sz="1600" dirty="0"/>
+              <a:t>    animation__2='property: rotation; dur: 1000; from: </a:t>
+            </a:r>
+            <a:r>
+              <a:rPr lang="en-US" sz="1600" b="1" dirty="0"/>
+              <a:t>0 0 0</a:t>
+            </a:r>
+            <a:r>
+              <a:rPr lang="en-US" sz="1600" dirty="0"/>
+              <a:t>;    to: </a:t>
+            </a:r>
+            <a:r>
+              <a:rPr lang="en-US" sz="1600" b="1" dirty="0"/>
+              <a:t>0 360 0</a:t>
+            </a:r>
+            <a:r>
+              <a:rPr lang="en-US" sz="1600" dirty="0"/>
+              <a:t>; </a:t>
+            </a:r>
+            <a:r>
+              <a:rPr lang="en-US" sz="1600" dirty="0" err="1"/>
+              <a:t>dir</a:t>
+            </a:r>
+            <a:r>
+              <a:rPr lang="en-US" sz="1600" dirty="0"/>
+              <a:t>: </a:t>
+            </a:r>
+            <a:r>
+              <a:rPr lang="en-US" sz="1600" dirty="0">
+                <a:solidFill>
+                  <a:srgbClr val="0070C0"/>
+                </a:solidFill>
+              </a:rPr>
+              <a:t>normal</a:t>
+            </a:r>
+            <a:r>
+              <a:rPr lang="en-US" sz="1600" dirty="0"/>
+              <a:t>;    easing: linear; loop: true;'</a:t>
+            </a:r>
+          </a:p>
+          <a:p>
+            <a:pPr marL="0" indent="0">
+              <a:buNone/>
+            </a:pPr>
+            <a:r>
+              <a:rPr lang="en-US" sz="1600" dirty="0"/>
+              <a:t>    animation__3='property:  scale; dur: 1000; from: </a:t>
+            </a:r>
+            <a:r>
+              <a:rPr lang="en-US" sz="1600" b="1" dirty="0"/>
+              <a:t>1 1 1</a:t>
+            </a:r>
+            <a:r>
+              <a:rPr lang="en-US" sz="1600" dirty="0"/>
+              <a:t>;    to: </a:t>
+            </a:r>
+            <a:r>
+              <a:rPr lang="en-US" sz="1600" b="1" dirty="0"/>
+              <a:t>2 2 2</a:t>
+            </a:r>
+            <a:r>
+              <a:rPr lang="en-US" sz="1600" dirty="0"/>
+              <a:t>;   </a:t>
+            </a:r>
+            <a:r>
+              <a:rPr lang="en-US" sz="1600" dirty="0" err="1"/>
+              <a:t>dir</a:t>
+            </a:r>
+            <a:r>
+              <a:rPr lang="en-US" sz="1600" dirty="0"/>
+              <a:t>: </a:t>
+            </a:r>
+            <a:r>
+              <a:rPr lang="en-US" sz="1600" dirty="0">
+                <a:solidFill>
+                  <a:srgbClr val="0070C0"/>
+                </a:solidFill>
+              </a:rPr>
+              <a:t>alternate</a:t>
+            </a:r>
+            <a:r>
+              <a:rPr lang="en-US" sz="1600" dirty="0"/>
+              <a:t>; easing: linear; loop: true;'&gt;</a:t>
+            </a:r>
+          </a:p>
+          <a:p>
+            <a:pPr marL="0" indent="0">
+              <a:buNone/>
+            </a:pPr>
+            <a:r>
+              <a:rPr lang="en-US" sz="1600" dirty="0"/>
+              <a:t>&lt;/a-sphere&gt;</a:t>
+            </a:r>
+          </a:p>
+          <a:p>
+            <a:pPr marL="0" indent="0">
+              <a:buNone/>
+            </a:pPr>
+            <a:endParaRPr lang="en-US" sz="1600" dirty="0"/>
+          </a:p>
+          <a:p>
+            <a:pPr marL="0" indent="0">
+              <a:buNone/>
+            </a:pPr>
+            <a:endParaRPr lang="en-US" sz="1600" dirty="0"/>
+          </a:p>
+          <a:p>
+            <a:pPr marL="0" indent="0">
+              <a:buNone/>
+            </a:pPr>
+            <a:r>
+              <a:rPr lang="en-US" sz="2400" dirty="0"/>
+              <a:t>A</a:t>
+            </a:r>
+            <a:r>
+              <a:rPr lang="en-US" sz="2400"/>
+              <a:t>nimations </a:t>
+            </a:r>
+            <a:r>
+              <a:rPr lang="en-US" sz="2400" dirty="0"/>
+              <a:t>can change any property with a numeric / vector / color value</a:t>
+            </a:r>
+          </a:p>
+        </p:txBody>
+      </p:sp>
+    </p:spTree>
+    <p:extLst>
+      <p:ext uri="{BB962C8B-B14F-4D97-AF65-F5344CB8AC3E}">
+        <p14:creationId xmlns:p14="http://schemas.microsoft.com/office/powerpoint/2010/main" val="4092314294"/>
+      </p:ext>
+    </p:extLst>
+  </p:cSld>
+  <p:clrMapOvr>
+    <a:masterClrMapping/>
+  </p:clrMapOvr>
+</p:sld>
+</file>
+
+<file path=ppt/slides/slide21.xml><?xml version="1.0" encoding="utf-8"?>
 <p:sld xmlns:a="http://schemas.openxmlformats.org/drawingml/2006/main" xmlns:r="http://schemas.openxmlformats.org/officeDocument/2006/relationships" xmlns:p="http://schemas.openxmlformats.org/presentationml/2006/main">
   <p:cSld>
     <p:spTree>
@@ -10321,7 +10410,7 @@
                   <a:schemeClr val="accent1"/>
                 </a:solidFill>
               </a:rPr>
-              <a:t>rotation=“45 45 45" </a:t>
+              <a:t>rotation= "45 45 45" </a:t>
             </a:r>
             <a:r>
               <a:rPr lang="en-US" dirty="0"/>
@@ -11631,6 +11720,9 @@
             </a:r>
           </a:p>
           <a:p>
+            <a:pPr marL="0" indent="0">
+              <a:buNone/>
+            </a:pPr>
             <a:r>
               <a:rPr lang="en-US" dirty="0"/>
               <a:t>	animation=   "</a:t>
@@ -11734,6 +11826,9 @@
             </a:r>
           </a:p>
           <a:p>
+            <a:pPr marL="0" indent="0">
+              <a:buNone/>
+            </a:pPr>
             <a:r>
               <a:rPr lang="en-US" dirty="0">
                 <a:solidFill>
